--- a/downloads/five9-study-deck.pptx
+++ b/downloads/five9-study-deck.pptx
@@ -22,6 +22,7 @@
     <p:sldId id="273" r:id="rId18"/>
     <p:sldId id="274" r:id="rId19"/>
     <p:sldId id="275" r:id="rId20"/>
+    <p:sldId id="276" r:id="rId21"/>
   </p:sldIdLst>
   <p:sldSz cx="9144000" cy="5143500"/>
 </p:presentation>
@@ -924,6 +925,75 @@
 </p:sld>
 </file>
 
+<file path=ppt/slides/slide21.xml><?xml version="1.0" encoding="utf-8"?>
+<p:sld xmlns:a="http://schemas.openxmlformats.org/drawingml/2006/main" xmlns:r="http://schemas.openxmlformats.org/officeDocument/2006/relationships" xmlns:p="http://schemas.openxmlformats.org/presentationml/2006/main">
+  <p:cSld>
+    <p:spTree>
+      <p:nvGrpSpPr>
+        <p:cNvPr id="1" name=""/>
+        <p:cNvGrpSpPr/>
+        <p:nvPr/>
+      </p:nvGrpSpPr>
+      <p:grpSpPr>
+        <a:xfrm>
+          <a:off x="0" y="0"/>
+          <a:ext cx="0" cy="0"/>
+          <a:chOff x="0" y="0"/>
+          <a:chExt cx="0" cy="0"/>
+        </a:xfrm>
+      </p:grpSpPr>
+      <p:sp>
+        <p:nvSpPr>
+          <p:cNvPr id="2" name="Title"/>
+          <p:cNvSpPr/>
+          <p:nvPr/>
+        </p:nvSpPr>
+        <p:spPr>
+          <a:xfrm>
+            <a:off x="400000" y="300000"/>
+            <a:ext cx="8000000" cy="800000"/>
+          </a:xfrm>
+        </p:spPr>
+        <p:txBody>
+          <a:bodyPr/>
+          <a:lstStyle/>
+          <a:p>
+            <a:r>
+              <a:t>Sources and go deeper</a:t>
+            </a:r>
+          </a:p>
+        </p:txBody>
+      </p:sp>
+      <p:sp>
+        <p:nvSpPr>
+          <p:cNvPr id="3" name="Body"/>
+          <p:cNvSpPr/>
+          <p:nvPr/>
+        </p:nvSpPr>
+        <p:spPr>
+          <a:xfrm>
+            <a:off x="400000" y="1400000"/>
+            <a:ext cx="8000000" cy="4000000"/>
+          </a:xfrm>
+        </p:spPr>
+        <p:txBody>
+          <a:bodyPr/>
+          <a:lstStyle/>
+          <a:p>
+            <a:r>
+              <a:t>Sources and go deeper Planning your implementation. vendor. https://documentation.five9.com/bundle/basic-admin/page/basic-admin/intro/planning-your-implementation.htm. last checked 2026-10. Technical requirements PDF. vendor. https://documentation-be.five9.com/bundle/five9-technical-requirements/raw/resource/enus/five9-technical-requirements.pdf. last checked 2026-10. IANA service names and port numbers. ports. https://www.iana.org/assignments/service-names-port-numbers/service-names-port-numbers.xhtml. last checked 2026-10. RFC 3261, SIP: Session Initiation Protocol. rfc. https://www.rfc-editor.org/rfc/rfc3261. last checked 2026-10. Interactive voice response. wikipedia. https://en.wikipedia.org/wiki/Interactive_voice_response. last checked 2026-10.</a:t>
+            </a:r>
+          </a:p>
+        </p:txBody>
+      </p:sp>
+    </p:spTree>
+  </p:cSld>
+  <p:clrMapOvr>
+    <a:masterClrMapping/>
+  </p:clrMapOvr>
+</p:sld>
+</file>
+
 <file path=ppt/slides/slide3.xml><?xml version="1.0" encoding="utf-8"?>
 <p:sld xmlns:a="http://schemas.openxmlformats.org/drawingml/2006/main" xmlns:r="http://schemas.openxmlformats.org/officeDocument/2006/relationships" xmlns:p="http://schemas.openxmlformats.org/presentationml/2006/main">
   <p:cSld>

--- a/downloads/five9-study-deck.pptx
+++ b/downloads/five9-study-deck.pptx
@@ -23,6 +23,11 @@
     <p:sldId id="274" r:id="rId19"/>
     <p:sldId id="275" r:id="rId20"/>
     <p:sldId id="276" r:id="rId21"/>
+    <p:sldId id="277" r:id="rId22"/>
+    <p:sldId id="278" r:id="rId23"/>
+    <p:sldId id="279" r:id="rId24"/>
+    <p:sldId id="280" r:id="rId25"/>
+    <p:sldId id="281" r:id="rId26"/>
   </p:sldIdLst>
   <p:sldSz cx="9144000" cy="5143500"/>
 </p:presentation>
@@ -890,6 +895,351 @@
           <a:lstStyle/>
           <a:p>
             <a:r>
+              <a:t>Skills routing and ACD</a:t>
+            </a:r>
+          </a:p>
+        </p:txBody>
+      </p:sp>
+      <p:sp>
+        <p:nvSpPr>
+          <p:cNvPr id="3" name="Body"/>
+          <p:cNvSpPr/>
+          <p:nvPr/>
+        </p:nvSpPr>
+        <p:spPr>
+          <a:xfrm>
+            <a:off x="400000" y="1400000"/>
+            <a:ext cx="8000000" cy="4000000"/>
+          </a:xfrm>
+        </p:spPr>
+        <p:txBody>
+          <a:bodyPr/>
+          <a:lstStyle/>
+          <a:p>
+            <a:r>
+              <a:t>A skill group is the queue the admin chapter describes. The general word ACD stays on its own page.</a:t>
+            </a:r>
+          </a:p>
+        </p:txBody>
+      </p:sp>
+    </p:spTree>
+  </p:cSld>
+  <p:clrMapOvr>
+    <a:masterClrMapping/>
+  </p:clrMapOvr>
+</p:sld>
+</file>
+
+<file path=ppt/slides/slide21.xml><?xml version="1.0" encoding="utf-8"?>
+<p:sld xmlns:a="http://schemas.openxmlformats.org/drawingml/2006/main" xmlns:r="http://schemas.openxmlformats.org/officeDocument/2006/relationships" xmlns:p="http://schemas.openxmlformats.org/presentationml/2006/main">
+  <p:cSld>
+    <p:spTree>
+      <p:nvGrpSpPr>
+        <p:cNvPr id="1" name=""/>
+        <p:cNvGrpSpPr/>
+        <p:nvPr/>
+      </p:nvGrpSpPr>
+      <p:grpSpPr>
+        <a:xfrm>
+          <a:off x="0" y="0"/>
+          <a:ext cx="0" cy="0"/>
+          <a:chOff x="0" y="0"/>
+          <a:chExt cx="0" cy="0"/>
+        </a:xfrm>
+      </p:grpSpPr>
+      <p:sp>
+        <p:nvSpPr>
+          <p:cNvPr id="2" name="Title"/>
+          <p:cNvSpPr/>
+          <p:nvPr/>
+        </p:nvSpPr>
+        <p:spPr>
+          <a:xfrm>
+            <a:off x="400000" y="300000"/>
+            <a:ext cx="8000000" cy="800000"/>
+          </a:xfrm>
+        </p:spPr>
+        <p:txBody>
+          <a:bodyPr/>
+          <a:lstStyle/>
+          <a:p>
+            <a:r>
+              <a:t>Workforce management</a:t>
+            </a:r>
+          </a:p>
+        </p:txBody>
+      </p:sp>
+      <p:sp>
+        <p:nvSpPr>
+          <p:cNvPr id="3" name="Body"/>
+          <p:cNvSpPr/>
+          <p:nvPr/>
+        </p:nvSpPr>
+        <p:spPr>
+          <a:xfrm>
+            <a:off x="400000" y="1400000"/>
+            <a:ext cx="8000000" cy="4000000"/>
+          </a:xfrm>
+        </p:spPr>
+        <p:txBody>
+          <a:bodyPr/>
+          <a:lstStyle/>
+          <a:p>
+            <a:r>
+              <a:t>WFM is the roster. The pages name the tools and leave the formulas unnamed.</a:t>
+            </a:r>
+          </a:p>
+        </p:txBody>
+      </p:sp>
+    </p:spTree>
+  </p:cSld>
+  <p:clrMapOvr>
+    <a:masterClrMapping/>
+  </p:clrMapOvr>
+</p:sld>
+</file>
+
+<file path=ppt/slides/slide22.xml><?xml version="1.0" encoding="utf-8"?>
+<p:sld xmlns:a="http://schemas.openxmlformats.org/drawingml/2006/main" xmlns:r="http://schemas.openxmlformats.org/officeDocument/2006/relationships" xmlns:p="http://schemas.openxmlformats.org/presentationml/2006/main">
+  <p:cSld>
+    <p:spTree>
+      <p:nvGrpSpPr>
+        <p:cNvPr id="1" name=""/>
+        <p:cNvGrpSpPr/>
+        <p:nvPr/>
+      </p:nvGrpSpPr>
+      <p:grpSpPr>
+        <a:xfrm>
+          <a:off x="0" y="0"/>
+          <a:ext cx="0" cy="0"/>
+          <a:chOff x="0" y="0"/>
+          <a:chExt cx="0" cy="0"/>
+        </a:xfrm>
+      </p:grpSpPr>
+      <p:sp>
+        <p:nvSpPr>
+          <p:cNvPr id="2" name="Title"/>
+          <p:cNvSpPr/>
+          <p:nvPr/>
+        </p:nvSpPr>
+        <p:spPr>
+          <a:xfrm>
+            <a:off x="400000" y="300000"/>
+            <a:ext cx="8000000" cy="800000"/>
+          </a:xfrm>
+        </p:spPr>
+        <p:txBody>
+          <a:bodyPr/>
+          <a:lstStyle/>
+          <a:p>
+            <a:r>
+              <a:t>Quality management and analytics</a:t>
+            </a:r>
+          </a:p>
+        </p:txBody>
+      </p:sp>
+      <p:sp>
+        <p:nvSpPr>
+          <p:cNvPr id="3" name="Body"/>
+          <p:cNvSpPr/>
+          <p:nvPr/>
+        </p:nvSpPr>
+        <p:spPr>
+          <a:xfrm>
+            <a:off x="400000" y="1400000"/>
+            <a:ext cx="8000000" cy="4000000"/>
+          </a:xfrm>
+        </p:spPr>
+        <p:txBody>
+          <a:bodyPr/>
+          <a:lstStyle/>
+          <a:p>
+            <a:r>
+              <a:t>Quality scores a recording against a form. Analytics sweeps interactions. The percents stay on the page that printed them.</a:t>
+            </a:r>
+          </a:p>
+        </p:txBody>
+      </p:sp>
+    </p:spTree>
+  </p:cSld>
+  <p:clrMapOvr>
+    <a:masterClrMapping/>
+  </p:clrMapOvr>
+</p:sld>
+</file>
+
+<file path=ppt/slides/slide23.xml><?xml version="1.0" encoding="utf-8"?>
+<p:sld xmlns:a="http://schemas.openxmlformats.org/drawingml/2006/main" xmlns:r="http://schemas.openxmlformats.org/officeDocument/2006/relationships" xmlns:p="http://schemas.openxmlformats.org/presentationml/2006/main">
+  <p:cSld>
+    <p:spTree>
+      <p:nvGrpSpPr>
+        <p:cNvPr id="1" name=""/>
+        <p:cNvGrpSpPr/>
+        <p:nvPr/>
+      </p:nvGrpSpPr>
+      <p:grpSpPr>
+        <a:xfrm>
+          <a:off x="0" y="0"/>
+          <a:ext cx="0" cy="0"/>
+          <a:chOff x="0" y="0"/>
+          <a:chExt cx="0" cy="0"/>
+        </a:xfrm>
+      </p:grpSpPr>
+      <p:sp>
+        <p:nvSpPr>
+          <p:cNvPr id="2" name="Title"/>
+          <p:cNvSpPr/>
+          <p:nvPr/>
+        </p:nvSpPr>
+        <p:spPr>
+          <a:xfrm>
+            <a:off x="400000" y="300000"/>
+            <a:ext cx="8000000" cy="800000"/>
+          </a:xfrm>
+        </p:spPr>
+        <p:txBody>
+          <a:bodyPr/>
+          <a:lstStyle/>
+          <a:p>
+            <a:r>
+              <a:t>CRM and CTI integrations</a:t>
+            </a:r>
+          </a:p>
+        </p:txBody>
+      </p:sp>
+      <p:sp>
+        <p:nvSpPr>
+          <p:cNvPr id="3" name="Body"/>
+          <p:cNvSpPr/>
+          <p:nvPr/>
+        </p:nvSpPr>
+        <p:spPr>
+          <a:xfrm>
+            <a:off x="400000" y="1400000"/>
+            <a:ext cx="8000000" cy="4000000"/>
+          </a:xfrm>
+        </p:spPr>
+        <p:txBody>
+          <a:bodyPr/>
+          <a:lstStyle/>
+          <a:p>
+            <a:r>
+              <a:t>Public pages name the CRMs and the CTI API. Admin feature lists that did not open stay blank.</a:t>
+            </a:r>
+          </a:p>
+        </p:txBody>
+      </p:sp>
+    </p:spTree>
+  </p:cSld>
+  <p:clrMapOvr>
+    <a:masterClrMapping/>
+  </p:clrMapOvr>
+</p:sld>
+</file>
+
+<file path=ppt/slides/slide24.xml><?xml version="1.0" encoding="utf-8"?>
+<p:sld xmlns:a="http://schemas.openxmlformats.org/drawingml/2006/main" xmlns:r="http://schemas.openxmlformats.org/officeDocument/2006/relationships" xmlns:p="http://schemas.openxmlformats.org/presentationml/2006/main">
+  <p:cSld>
+    <p:spTree>
+      <p:nvGrpSpPr>
+        <p:cNvPr id="1" name=""/>
+        <p:cNvGrpSpPr/>
+        <p:nvPr/>
+      </p:nvGrpSpPr>
+      <p:grpSpPr>
+        <a:xfrm>
+          <a:off x="0" y="0"/>
+          <a:ext cx="0" cy="0"/>
+          <a:chOff x="0" y="0"/>
+          <a:chExt cx="0" cy="0"/>
+        </a:xfrm>
+      </p:grpSpPr>
+      <p:sp>
+        <p:nvSpPr>
+          <p:cNvPr id="2" name="Title"/>
+          <p:cNvSpPr/>
+          <p:nvPr/>
+        </p:nvSpPr>
+        <p:spPr>
+          <a:xfrm>
+            <a:off x="400000" y="300000"/>
+            <a:ext cx="8000000" cy="800000"/>
+          </a:xfrm>
+        </p:spPr>
+        <p:txBody>
+          <a:bodyPr/>
+          <a:lstStyle/>
+          <a:p>
+            <a:r>
+              <a:t>Ecosystem</a:t>
+            </a:r>
+          </a:p>
+        </p:txBody>
+      </p:sp>
+      <p:sp>
+        <p:nvSpPr>
+          <p:cNvPr id="3" name="Body"/>
+          <p:cNvSpPr/>
+          <p:nvPr/>
+        </p:nvSpPr>
+        <p:spPr>
+          <a:xfrm>
+            <a:off x="400000" y="1400000"/>
+            <a:ext cx="8000000" cy="4000000"/>
+          </a:xfrm>
+        </p:spPr>
+        <p:txBody>
+          <a:bodyPr/>
+          <a:lstStyle/>
+          <a:p>
+            <a:r>
+              <a:t>A box needs a page. A line is teaching. A gap stays a gap until a body comes back.</a:t>
+            </a:r>
+          </a:p>
+        </p:txBody>
+      </p:sp>
+    </p:spTree>
+  </p:cSld>
+  <p:clrMapOvr>
+    <a:masterClrMapping/>
+  </p:clrMapOvr>
+</p:sld>
+</file>
+
+<file path=ppt/slides/slide25.xml><?xml version="1.0" encoding="utf-8"?>
+<p:sld xmlns:a="http://schemas.openxmlformats.org/drawingml/2006/main" xmlns:r="http://schemas.openxmlformats.org/officeDocument/2006/relationships" xmlns:p="http://schemas.openxmlformats.org/presentationml/2006/main">
+  <p:cSld>
+    <p:spTree>
+      <p:nvGrpSpPr>
+        <p:cNvPr id="1" name=""/>
+        <p:cNvGrpSpPr/>
+        <p:nvPr/>
+      </p:nvGrpSpPr>
+      <p:grpSpPr>
+        <a:xfrm>
+          <a:off x="0" y="0"/>
+          <a:ext cx="0" cy="0"/>
+          <a:chOff x="0" y="0"/>
+          <a:chExt cx="0" cy="0"/>
+        </a:xfrm>
+      </p:grpSpPr>
+      <p:sp>
+        <p:nvSpPr>
+          <p:cNvPr id="2" name="Title"/>
+          <p:cNvSpPr/>
+          <p:nvPr/>
+        </p:nvSpPr>
+        <p:spPr>
+          <a:xfrm>
+            <a:off x="400000" y="300000"/>
+            <a:ext cx="8000000" cy="800000"/>
+          </a:xfrm>
+        </p:spPr>
+        <p:txBody>
+          <a:bodyPr/>
+          <a:lstStyle/>
+          <a:p>
+            <a:r>
               <a:t>Disclaimer</a:t>
             </a:r>
           </a:p>
@@ -925,7 +1275,7 @@
 </p:sld>
 </file>
 
-<file path=ppt/slides/slide21.xml><?xml version="1.0" encoding="utf-8"?>
+<file path=ppt/slides/slide26.xml><?xml version="1.0" encoding="utf-8"?>
 <p:sld xmlns:a="http://schemas.openxmlformats.org/drawingml/2006/main" xmlns:r="http://schemas.openxmlformats.org/officeDocument/2006/relationships" xmlns:p="http://schemas.openxmlformats.org/presentationml/2006/main">
   <p:cSld>
     <p:spTree>
